--- a/MLBasic/33 - Исследование зависимостей/Presentation/Зависимости.pptx
+++ b/MLBasic/33 - Исследование зависимостей/Presentation/Зависимости.pptx
@@ -4009,7 +4009,7 @@
           <a:p>
             <a:fld id="{1D8BD707-D9CF-40AE-B4C6-C98DA3205C09}" type="datetimeFigureOut">
               <a:rPr lang="en-US"/>
-              <a:t>9/3/24</a:t>
+              <a:t>4/15/25</a:t>
             </a:fld>
             <a:endParaRPr lang="en-US"/>
           </a:p>
@@ -4192,7 +4192,7 @@
           <a:p>
             <a:fld id="{1D8BD707-D9CF-40AE-B4C6-C98DA3205C09}" type="datetimeFigureOut">
               <a:rPr lang="en-US"/>
-              <a:t>9/3/24</a:t>
+              <a:t>4/15/25</a:t>
             </a:fld>
             <a:endParaRPr lang="en-US"/>
           </a:p>
@@ -8765,6 +8765,218 @@
           </p:sp>
         </mc:Fallback>
       </mc:AlternateContent>
+      <p:sp>
+        <p:nvSpPr>
+          <p:cNvPr id="5" name="Rounded Rectangle 4">
+            <a:extLst>
+              <a:ext uri="{FF2B5EF4-FFF2-40B4-BE49-F238E27FC236}">
+                <a16:creationId xmlns:a16="http://schemas.microsoft.com/office/drawing/2014/main" id="{E1BAF027-539A-0145-A380-15847D26463F}"/>
+              </a:ext>
+            </a:extLst>
+          </p:cNvPr>
+          <p:cNvSpPr/>
+          <p:nvPr/>
+        </p:nvSpPr>
+        <p:spPr>
+          <a:xfrm>
+            <a:off x="2464340" y="3716788"/>
+            <a:ext cx="1757367" cy="536764"/>
+          </a:xfrm>
+          <a:prstGeom prst="roundRect">
+            <a:avLst/>
+          </a:prstGeom>
+          <a:noFill/>
+          <a:ln>
+            <a:solidFill>
+              <a:schemeClr val="accent6">
+                <a:lumMod val="75000"/>
+              </a:schemeClr>
+            </a:solidFill>
+          </a:ln>
+        </p:spPr>
+        <p:style>
+          <a:lnRef idx="2">
+            <a:schemeClr val="accent1">
+              <a:shade val="50000"/>
+            </a:schemeClr>
+          </a:lnRef>
+          <a:fillRef idx="1">
+            <a:schemeClr val="accent1"/>
+          </a:fillRef>
+          <a:effectRef idx="0">
+            <a:schemeClr val="accent1"/>
+          </a:effectRef>
+          <a:fontRef idx="minor">
+            <a:schemeClr val="lt1"/>
+          </a:fontRef>
+        </p:style>
+        <p:txBody>
+          <a:bodyPr rtlCol="0" anchor="ctr"/>
+          <a:lstStyle/>
+          <a:p>
+            <a:pPr algn="ctr"/>
+            <a:endParaRPr lang="en-US"/>
+          </a:p>
+        </p:txBody>
+      </p:sp>
+      <p:sp>
+        <p:nvSpPr>
+          <p:cNvPr id="10" name="Rounded Rectangle 9">
+            <a:extLst>
+              <a:ext uri="{FF2B5EF4-FFF2-40B4-BE49-F238E27FC236}">
+                <a16:creationId xmlns:a16="http://schemas.microsoft.com/office/drawing/2014/main" id="{730D28FF-C350-0B47-A227-190C94ECF5F0}"/>
+              </a:ext>
+            </a:extLst>
+          </p:cNvPr>
+          <p:cNvSpPr/>
+          <p:nvPr/>
+        </p:nvSpPr>
+        <p:spPr>
+          <a:xfrm>
+            <a:off x="4350005" y="3716788"/>
+            <a:ext cx="1757367" cy="536764"/>
+          </a:xfrm>
+          <a:prstGeom prst="roundRect">
+            <a:avLst/>
+          </a:prstGeom>
+          <a:noFill/>
+          <a:ln>
+            <a:solidFill>
+              <a:srgbClr val="FFC000"/>
+            </a:solidFill>
+          </a:ln>
+        </p:spPr>
+        <p:style>
+          <a:lnRef idx="2">
+            <a:schemeClr val="accent1">
+              <a:shade val="50000"/>
+            </a:schemeClr>
+          </a:lnRef>
+          <a:fillRef idx="1">
+            <a:schemeClr val="accent1"/>
+          </a:fillRef>
+          <a:effectRef idx="0">
+            <a:schemeClr val="accent1"/>
+          </a:effectRef>
+          <a:fontRef idx="minor">
+            <a:schemeClr val="lt1"/>
+          </a:fontRef>
+        </p:style>
+        <p:txBody>
+          <a:bodyPr rtlCol="0" anchor="ctr"/>
+          <a:lstStyle/>
+          <a:p>
+            <a:pPr algn="ctr"/>
+            <a:endParaRPr lang="en-US"/>
+          </a:p>
+        </p:txBody>
+      </p:sp>
+      <p:sp>
+        <p:nvSpPr>
+          <p:cNvPr id="12" name="Rounded Rectangle 11">
+            <a:extLst>
+              <a:ext uri="{FF2B5EF4-FFF2-40B4-BE49-F238E27FC236}">
+                <a16:creationId xmlns:a16="http://schemas.microsoft.com/office/drawing/2014/main" id="{92AAC462-71AD-F84E-B668-4B217172AD50}"/>
+              </a:ext>
+            </a:extLst>
+          </p:cNvPr>
+          <p:cNvSpPr/>
+          <p:nvPr/>
+        </p:nvSpPr>
+        <p:spPr>
+          <a:xfrm>
+            <a:off x="7120927" y="2331690"/>
+            <a:ext cx="1399825" cy="343271"/>
+          </a:xfrm>
+          <a:prstGeom prst="roundRect">
+            <a:avLst/>
+          </a:prstGeom>
+          <a:noFill/>
+          <a:ln>
+            <a:solidFill>
+              <a:srgbClr val="FFC000"/>
+            </a:solidFill>
+          </a:ln>
+        </p:spPr>
+        <p:style>
+          <a:lnRef idx="2">
+            <a:schemeClr val="accent1">
+              <a:shade val="50000"/>
+            </a:schemeClr>
+          </a:lnRef>
+          <a:fillRef idx="1">
+            <a:schemeClr val="accent1"/>
+          </a:fillRef>
+          <a:effectRef idx="0">
+            <a:schemeClr val="accent1"/>
+          </a:effectRef>
+          <a:fontRef idx="minor">
+            <a:schemeClr val="lt1"/>
+          </a:fontRef>
+        </p:style>
+        <p:txBody>
+          <a:bodyPr rtlCol="0" anchor="ctr"/>
+          <a:lstStyle/>
+          <a:p>
+            <a:pPr algn="ctr"/>
+            <a:endParaRPr lang="en-US"/>
+          </a:p>
+        </p:txBody>
+      </p:sp>
+      <p:sp>
+        <p:nvSpPr>
+          <p:cNvPr id="13" name="Rounded Rectangle 12">
+            <a:extLst>
+              <a:ext uri="{FF2B5EF4-FFF2-40B4-BE49-F238E27FC236}">
+                <a16:creationId xmlns:a16="http://schemas.microsoft.com/office/drawing/2014/main" id="{605C8D6D-B3B2-C74C-8CE7-6D5A83FCA119}"/>
+              </a:ext>
+            </a:extLst>
+          </p:cNvPr>
+          <p:cNvSpPr/>
+          <p:nvPr/>
+        </p:nvSpPr>
+        <p:spPr>
+          <a:xfrm>
+            <a:off x="2523055" y="3082373"/>
+            <a:ext cx="1399825" cy="343271"/>
+          </a:xfrm>
+          <a:prstGeom prst="roundRect">
+            <a:avLst/>
+          </a:prstGeom>
+          <a:noFill/>
+          <a:ln>
+            <a:solidFill>
+              <a:schemeClr val="accent6">
+                <a:lumMod val="75000"/>
+              </a:schemeClr>
+            </a:solidFill>
+          </a:ln>
+        </p:spPr>
+        <p:style>
+          <a:lnRef idx="2">
+            <a:schemeClr val="accent1">
+              <a:shade val="50000"/>
+            </a:schemeClr>
+          </a:lnRef>
+          <a:fillRef idx="1">
+            <a:schemeClr val="accent1"/>
+          </a:fillRef>
+          <a:effectRef idx="0">
+            <a:schemeClr val="accent1"/>
+          </a:effectRef>
+          <a:fontRef idx="minor">
+            <a:schemeClr val="lt1"/>
+          </a:fontRef>
+        </p:style>
+        <p:txBody>
+          <a:bodyPr rtlCol="0" anchor="ctr"/>
+          <a:lstStyle/>
+          <a:p>
+            <a:pPr algn="ctr"/>
+            <a:endParaRPr lang="en-US"/>
+          </a:p>
+        </p:txBody>
+      </p:sp>
     </p:spTree>
     <p:extLst>
       <p:ext uri="{BB962C8B-B14F-4D97-AF65-F5344CB8AC3E}">
@@ -10627,6 +10839,110 @@
               <a:t>Наблюдаемые величины</a:t>
             </a:r>
             <a:endParaRPr lang="en-US" dirty="0"/>
+          </a:p>
+        </p:txBody>
+      </p:sp>
+      <p:sp>
+        <p:nvSpPr>
+          <p:cNvPr id="5" name="Rounded Rectangle 4">
+            <a:extLst>
+              <a:ext uri="{FF2B5EF4-FFF2-40B4-BE49-F238E27FC236}">
+                <a16:creationId xmlns:a16="http://schemas.microsoft.com/office/drawing/2014/main" id="{468C0DFA-ECB4-0643-9D8B-44CD6DA429EA}"/>
+              </a:ext>
+            </a:extLst>
+          </p:cNvPr>
+          <p:cNvSpPr/>
+          <p:nvPr/>
+        </p:nvSpPr>
+        <p:spPr>
+          <a:xfrm>
+            <a:off x="6883021" y="4057934"/>
+            <a:ext cx="322997" cy="313899"/>
+          </a:xfrm>
+          <a:prstGeom prst="roundRect">
+            <a:avLst/>
+          </a:prstGeom>
+          <a:noFill/>
+          <a:ln>
+            <a:solidFill>
+              <a:srgbClr val="FF0000"/>
+            </a:solidFill>
+          </a:ln>
+        </p:spPr>
+        <p:style>
+          <a:lnRef idx="2">
+            <a:schemeClr val="accent1">
+              <a:shade val="50000"/>
+            </a:schemeClr>
+          </a:lnRef>
+          <a:fillRef idx="1">
+            <a:schemeClr val="accent1"/>
+          </a:fillRef>
+          <a:effectRef idx="0">
+            <a:schemeClr val="accent1"/>
+          </a:effectRef>
+          <a:fontRef idx="minor">
+            <a:schemeClr val="lt1"/>
+          </a:fontRef>
+        </p:style>
+        <p:txBody>
+          <a:bodyPr rtlCol="0" anchor="ctr"/>
+          <a:lstStyle/>
+          <a:p>
+            <a:pPr algn="ctr"/>
+            <a:endParaRPr lang="en-US"/>
+          </a:p>
+        </p:txBody>
+      </p:sp>
+      <p:sp>
+        <p:nvSpPr>
+          <p:cNvPr id="16" name="Rounded Rectangle 15">
+            <a:extLst>
+              <a:ext uri="{FF2B5EF4-FFF2-40B4-BE49-F238E27FC236}">
+                <a16:creationId xmlns:a16="http://schemas.microsoft.com/office/drawing/2014/main" id="{A88A237F-C293-B442-979D-B1966C3EA64C}"/>
+              </a:ext>
+            </a:extLst>
+          </p:cNvPr>
+          <p:cNvSpPr/>
+          <p:nvPr/>
+        </p:nvSpPr>
+        <p:spPr>
+          <a:xfrm>
+            <a:off x="3061469" y="2361932"/>
+            <a:ext cx="322997" cy="313899"/>
+          </a:xfrm>
+          <a:prstGeom prst="roundRect">
+            <a:avLst/>
+          </a:prstGeom>
+          <a:noFill/>
+          <a:ln>
+            <a:solidFill>
+              <a:srgbClr val="FF0000"/>
+            </a:solidFill>
+          </a:ln>
+        </p:spPr>
+        <p:style>
+          <a:lnRef idx="2">
+            <a:schemeClr val="accent1">
+              <a:shade val="50000"/>
+            </a:schemeClr>
+          </a:lnRef>
+          <a:fillRef idx="1">
+            <a:schemeClr val="accent1"/>
+          </a:fillRef>
+          <a:effectRef idx="0">
+            <a:schemeClr val="accent1"/>
+          </a:effectRef>
+          <a:fontRef idx="minor">
+            <a:schemeClr val="lt1"/>
+          </a:fontRef>
+        </p:style>
+        <p:txBody>
+          <a:bodyPr rtlCol="0" anchor="ctr"/>
+          <a:lstStyle/>
+          <a:p>
+            <a:pPr algn="ctr"/>
+            <a:endParaRPr lang="en-US"/>
           </a:p>
         </p:txBody>
       </p:sp>
@@ -12316,6 +12632,58 @@
           </a:p>
         </p:txBody>
       </p:sp>
+      <p:sp>
+        <p:nvSpPr>
+          <p:cNvPr id="8" name="Rounded Rectangle 7">
+            <a:extLst>
+              <a:ext uri="{FF2B5EF4-FFF2-40B4-BE49-F238E27FC236}">
+                <a16:creationId xmlns:a16="http://schemas.microsoft.com/office/drawing/2014/main" id="{B5752636-39BE-DE43-A5C9-B0052B17A96E}"/>
+              </a:ext>
+            </a:extLst>
+          </p:cNvPr>
+          <p:cNvSpPr/>
+          <p:nvPr/>
+        </p:nvSpPr>
+        <p:spPr>
+          <a:xfrm>
+            <a:off x="978090" y="4440071"/>
+            <a:ext cx="7237159" cy="530004"/>
+          </a:xfrm>
+          <a:prstGeom prst="roundRect">
+            <a:avLst/>
+          </a:prstGeom>
+          <a:noFill/>
+          <a:ln>
+            <a:solidFill>
+              <a:srgbClr val="FF0000"/>
+            </a:solidFill>
+          </a:ln>
+        </p:spPr>
+        <p:style>
+          <a:lnRef idx="2">
+            <a:schemeClr val="accent1">
+              <a:shade val="50000"/>
+            </a:schemeClr>
+          </a:lnRef>
+          <a:fillRef idx="1">
+            <a:schemeClr val="accent1"/>
+          </a:fillRef>
+          <a:effectRef idx="0">
+            <a:schemeClr val="accent1"/>
+          </a:effectRef>
+          <a:fontRef idx="minor">
+            <a:schemeClr val="lt1"/>
+          </a:fontRef>
+        </p:style>
+        <p:txBody>
+          <a:bodyPr rtlCol="0" anchor="ctr"/>
+          <a:lstStyle/>
+          <a:p>
+            <a:pPr algn="ctr"/>
+            <a:endParaRPr lang="en-US"/>
+          </a:p>
+        </p:txBody>
+      </p:sp>
     </p:spTree>
     <p:extLst>
       <p:ext uri="{BB962C8B-B14F-4D97-AF65-F5344CB8AC3E}">
